--- a/koreatech-db/theory/이론7장_기업_정보시스템과_데이터베이스.pptx
+++ b/koreatech-db/theory/이론7장_기업_정보시스템과_데이터베이스.pptx
@@ -7992,9 +7992,9 @@
                 <a:solidFill>
                   <a:srgbClr val="7A869C"/>
                 </a:solidFill>
-                <a:latin typeface="나눔고딕코딩"/>
-                <a:ea typeface="나눔고딕코딩"/>
-                <a:cs typeface="나눔고딕코딩"/>
+                <a:latin typeface="D2Coding"/>
+                <a:ea typeface="D2Coding"/>
+                <a:cs typeface="D2Coding"/>
               </a:rPr>
               <a:t>1</a:t>
             </a:r>
@@ -8010,9 +8010,9 @@
                 <a:solidFill>
                   <a:srgbClr val="7A869C"/>
                 </a:solidFill>
-                <a:latin typeface="나눔고딕코딩"/>
-                <a:ea typeface="나눔고딕코딩"/>
-                <a:cs typeface="나눔고딕코딩"/>
+                <a:latin typeface="D2Coding"/>
+                <a:ea typeface="D2Coding"/>
+                <a:cs typeface="D2Coding"/>
               </a:rPr>
               <a:t>2</a:t>
             </a:r>
@@ -8028,9 +8028,9 @@
                 <a:solidFill>
                   <a:srgbClr val="7A869C"/>
                 </a:solidFill>
-                <a:latin typeface="나눔고딕코딩"/>
-                <a:ea typeface="나눔고딕코딩"/>
-                <a:cs typeface="나눔고딕코딩"/>
+                <a:latin typeface="D2Coding"/>
+                <a:ea typeface="D2Coding"/>
+                <a:cs typeface="D2Coding"/>
               </a:rPr>
               <a:t>3</a:t>
             </a:r>
@@ -8046,9 +8046,9 @@
                 <a:solidFill>
                   <a:srgbClr val="7A869C"/>
                 </a:solidFill>
-                <a:latin typeface="나눔고딕코딩"/>
-                <a:ea typeface="나눔고딕코딩"/>
-                <a:cs typeface="나눔고딕코딩"/>
+                <a:latin typeface="D2Coding"/>
+                <a:ea typeface="D2Coding"/>
+                <a:cs typeface="D2Coding"/>
               </a:rPr>
               <a:t>4</a:t>
             </a:r>
@@ -8064,9 +8064,9 @@
                 <a:solidFill>
                   <a:srgbClr val="7A869C"/>
                 </a:solidFill>
-                <a:latin typeface="나눔고딕코딩"/>
-                <a:ea typeface="나눔고딕코딩"/>
-                <a:cs typeface="나눔고딕코딩"/>
+                <a:latin typeface="D2Coding"/>
+                <a:ea typeface="D2Coding"/>
+                <a:cs typeface="D2Coding"/>
               </a:rPr>
               <a:t>5</a:t>
             </a:r>
@@ -8082,9 +8082,9 @@
                 <a:solidFill>
                   <a:srgbClr val="7A869C"/>
                 </a:solidFill>
-                <a:latin typeface="나눔고딕코딩"/>
-                <a:ea typeface="나눔고딕코딩"/>
-                <a:cs typeface="나눔고딕코딩"/>
+                <a:latin typeface="D2Coding"/>
+                <a:ea typeface="D2Coding"/>
+                <a:cs typeface="D2Coding"/>
               </a:rPr>
               <a:t>6</a:t>
             </a:r>
@@ -8100,9 +8100,9 @@
                 <a:solidFill>
                   <a:srgbClr val="7A869C"/>
                 </a:solidFill>
-                <a:latin typeface="나눔고딕코딩"/>
-                <a:ea typeface="나눔고딕코딩"/>
-                <a:cs typeface="나눔고딕코딩"/>
+                <a:latin typeface="D2Coding"/>
+                <a:ea typeface="D2Coding"/>
+                <a:cs typeface="D2Coding"/>
               </a:rPr>
               <a:t>7</a:t>
             </a:r>
@@ -8118,9 +8118,9 @@
                 <a:solidFill>
                   <a:srgbClr val="7A869C"/>
                 </a:solidFill>
-                <a:latin typeface="나눔고딕코딩"/>
-                <a:ea typeface="나눔고딕코딩"/>
-                <a:cs typeface="나눔고딕코딩"/>
+                <a:latin typeface="D2Coding"/>
+                <a:ea typeface="D2Coding"/>
+                <a:cs typeface="D2Coding"/>
               </a:rPr>
               <a:t>8</a:t>
             </a:r>
@@ -8136,9 +8136,9 @@
                 <a:solidFill>
                   <a:srgbClr val="7A869C"/>
                 </a:solidFill>
-                <a:latin typeface="나눔고딕코딩"/>
-                <a:ea typeface="나눔고딕코딩"/>
-                <a:cs typeface="나눔고딕코딩"/>
+                <a:latin typeface="D2Coding"/>
+                <a:ea typeface="D2Coding"/>
+                <a:cs typeface="D2Coding"/>
               </a:rPr>
               <a:t>9</a:t>
             </a:r>
@@ -8154,9 +8154,9 @@
                 <a:solidFill>
                   <a:srgbClr val="7A869C"/>
                 </a:solidFill>
-                <a:latin typeface="나눔고딕코딩"/>
-                <a:ea typeface="나눔고딕코딩"/>
-                <a:cs typeface="나눔고딕코딩"/>
+                <a:latin typeface="D2Coding"/>
+                <a:ea typeface="D2Coding"/>
+                <a:cs typeface="D2Coding"/>
               </a:rPr>
               <a:t>10</a:t>
             </a:r>
@@ -8172,9 +8172,9 @@
                 <a:solidFill>
                   <a:srgbClr val="7A869C"/>
                 </a:solidFill>
-                <a:latin typeface="나눔고딕코딩"/>
-                <a:ea typeface="나눔고딕코딩"/>
-                <a:cs typeface="나눔고딕코딩"/>
+                <a:latin typeface="D2Coding"/>
+                <a:ea typeface="D2Coding"/>
+                <a:cs typeface="D2Coding"/>
               </a:rPr>
               <a:t>11</a:t>
             </a:r>
@@ -8190,9 +8190,9 @@
                 <a:solidFill>
                   <a:srgbClr val="7A869C"/>
                 </a:solidFill>
-                <a:latin typeface="나눔고딕코딩"/>
-                <a:ea typeface="나눔고딕코딩"/>
-                <a:cs typeface="나눔고딕코딩"/>
+                <a:latin typeface="D2Coding"/>
+                <a:ea typeface="D2Coding"/>
+                <a:cs typeface="D2Coding"/>
               </a:rPr>
               <a:t>12</a:t>
             </a:r>
@@ -8208,9 +8208,9 @@
                 <a:solidFill>
                   <a:srgbClr val="7A869C"/>
                 </a:solidFill>
-                <a:latin typeface="나눔고딕코딩"/>
-                <a:ea typeface="나눔고딕코딩"/>
-                <a:cs typeface="나눔고딕코딩"/>
+                <a:latin typeface="D2Coding"/>
+                <a:ea typeface="D2Coding"/>
+                <a:cs typeface="D2Coding"/>
               </a:rPr>
               <a:t>13</a:t>
             </a:r>
@@ -8249,9 +8249,9 @@
                 <a:solidFill>
                   <a:srgbClr val="E6EAF2"/>
                 </a:solidFill>
-                <a:latin typeface="나눔고딕코딩"/>
-                <a:ea typeface="나눔고딕코딩"/>
-                <a:cs typeface="나눔고딕코딩"/>
+                <a:latin typeface="D2Coding"/>
+                <a:ea typeface="D2Coding"/>
+                <a:cs typeface="D2Coding"/>
               </a:rPr>
               <a:t>-- OLTP: 계산대의 질의 — 한 건을 정확히, 지금 당장</a:t>
             </a:r>
@@ -8267,9 +8267,9 @@
                 <a:solidFill>
                   <a:srgbClr val="E6EAF2"/>
                 </a:solidFill>
-                <a:latin typeface="나눔고딕코딩"/>
-                <a:ea typeface="나눔고딕코딩"/>
-                <a:cs typeface="나눔고딕코딩"/>
+                <a:latin typeface="D2Coding"/>
+                <a:ea typeface="D2Coding"/>
+                <a:cs typeface="D2Coding"/>
               </a:rPr>
               <a:t>INSERT INTO orders (cust_id, emp_id, order_date, status)</a:t>
             </a:r>
@@ -8285,9 +8285,9 @@
                 <a:solidFill>
                   <a:srgbClr val="E6EAF2"/>
                 </a:solidFill>
-                <a:latin typeface="나눔고딕코딩"/>
-                <a:ea typeface="나눔고딕코딩"/>
-                <a:cs typeface="나눔고딕코딩"/>
+                <a:latin typeface="D2Coding"/>
+                <a:ea typeface="D2Coding"/>
+                <a:cs typeface="D2Coding"/>
               </a:rPr>
               <a:t>VALUES ('C003', NULL, '2026-06-15', '주문접수');</a:t>
             </a:r>
@@ -8303,9 +8303,9 @@
                 <a:solidFill>
                   <a:srgbClr val="E6EAF2"/>
                 </a:solidFill>
-                <a:latin typeface="나눔고딕코딩"/>
-                <a:ea typeface="나눔고딕코딩"/>
-                <a:cs typeface="나눔고딕코딩"/>
+                <a:latin typeface="D2Coding"/>
+                <a:ea typeface="D2Coding"/>
+                <a:cs typeface="D2Coding"/>
               </a:rPr>
               <a:t/>
             </a:r>
@@ -8321,9 +8321,9 @@
                 <a:solidFill>
                   <a:srgbClr val="E6EAF2"/>
                 </a:solidFill>
-                <a:latin typeface="나눔고딕코딩"/>
-                <a:ea typeface="나눔고딕코딩"/>
-                <a:cs typeface="나눔고딕코딩"/>
+                <a:latin typeface="D2Coding"/>
+                <a:ea typeface="D2Coding"/>
+                <a:cs typeface="D2Coding"/>
               </a:rPr>
               <a:t>UPDATE products SET stock = stock - 1 WHERE prod_id = 'P006';</a:t>
             </a:r>
@@ -8339,9 +8339,9 @@
                 <a:solidFill>
                   <a:srgbClr val="E6EAF2"/>
                 </a:solidFill>
-                <a:latin typeface="나눔고딕코딩"/>
-                <a:ea typeface="나눔고딕코딩"/>
-                <a:cs typeface="나눔고딕코딩"/>
+                <a:latin typeface="D2Coding"/>
+                <a:ea typeface="D2Coding"/>
+                <a:cs typeface="D2Coding"/>
               </a:rPr>
               <a:t/>
             </a:r>
@@ -8357,9 +8357,9 @@
                 <a:solidFill>
                   <a:srgbClr val="E6EAF2"/>
                 </a:solidFill>
-                <a:latin typeface="나눔고딕코딩"/>
-                <a:ea typeface="나눔고딕코딩"/>
-                <a:cs typeface="나눔고딕코딩"/>
+                <a:latin typeface="D2Coding"/>
+                <a:ea typeface="D2Coding"/>
+                <a:cs typeface="D2Coding"/>
               </a:rPr>
               <a:t>-- OLAP: 회의실의 질의 — 전체를 훑어 패턴을 본다</a:t>
             </a:r>
@@ -8375,9 +8375,9 @@
                 <a:solidFill>
                   <a:srgbClr val="E6EAF2"/>
                 </a:solidFill>
-                <a:latin typeface="나눔고딕코딩"/>
-                <a:ea typeface="나눔고딕코딩"/>
-                <a:cs typeface="나눔고딕코딩"/>
+                <a:latin typeface="D2Coding"/>
+                <a:ea typeface="D2Coding"/>
+                <a:cs typeface="D2Coding"/>
               </a:rPr>
               <a:t>SELECT c.grade, SUM(i.qty * i.unit_price) AS 매출액</a:t>
             </a:r>
@@ -8393,9 +8393,9 @@
                 <a:solidFill>
                   <a:srgbClr val="E6EAF2"/>
                 </a:solidFill>
-                <a:latin typeface="나눔고딕코딩"/>
-                <a:ea typeface="나눔고딕코딩"/>
-                <a:cs typeface="나눔고딕코딩"/>
+                <a:latin typeface="D2Coding"/>
+                <a:ea typeface="D2Coding"/>
+                <a:cs typeface="D2Coding"/>
               </a:rPr>
               <a:t>FROM   customers c</a:t>
             </a:r>
@@ -8411,9 +8411,9 @@
                 <a:solidFill>
                   <a:srgbClr val="E6EAF2"/>
                 </a:solidFill>
-                <a:latin typeface="나눔고딕코딩"/>
-                <a:ea typeface="나눔고딕코딩"/>
-                <a:cs typeface="나눔고딕코딩"/>
+                <a:latin typeface="D2Coding"/>
+                <a:ea typeface="D2Coding"/>
+                <a:cs typeface="D2Coding"/>
               </a:rPr>
               <a:t>JOIN   orders      o ON c.cust_id  = o.cust_id</a:t>
             </a:r>
@@ -8429,9 +8429,9 @@
                 <a:solidFill>
                   <a:srgbClr val="E6EAF2"/>
                 </a:solidFill>
-                <a:latin typeface="나눔고딕코딩"/>
-                <a:ea typeface="나눔고딕코딩"/>
-                <a:cs typeface="나눔고딕코딩"/>
+                <a:latin typeface="D2Coding"/>
+                <a:ea typeface="D2Coding"/>
+                <a:cs typeface="D2Coding"/>
               </a:rPr>
               <a:t>JOIN   order_items i ON o.order_id = i.order_id</a:t>
             </a:r>
@@ -8447,9 +8447,9 @@
                 <a:solidFill>
                   <a:srgbClr val="E6EAF2"/>
                 </a:solidFill>
-                <a:latin typeface="나눔고딕코딩"/>
-                <a:ea typeface="나눔고딕코딩"/>
-                <a:cs typeface="나눔고딕코딩"/>
+                <a:latin typeface="D2Coding"/>
+                <a:ea typeface="D2Coding"/>
+                <a:cs typeface="D2Coding"/>
               </a:rPr>
               <a:t>WHERE  o.status &lt;&gt; '취소'</a:t>
             </a:r>
@@ -8465,9 +8465,9 @@
                 <a:solidFill>
                   <a:srgbClr val="E6EAF2"/>
                 </a:solidFill>
-                <a:latin typeface="나눔고딕코딩"/>
-                <a:ea typeface="나눔고딕코딩"/>
-                <a:cs typeface="나눔고딕코딩"/>
+                <a:latin typeface="D2Coding"/>
+                <a:ea typeface="D2Coding"/>
+                <a:cs typeface="D2Coding"/>
               </a:rPr>
               <a:t>GROUP  BY c.grade;</a:t>
             </a:r>
@@ -30749,9 +30749,9 @@
                 <a:solidFill>
                   <a:srgbClr val="7A869C"/>
                 </a:solidFill>
-                <a:latin typeface="나눔고딕코딩"/>
-                <a:ea typeface="나눔고딕코딩"/>
-                <a:cs typeface="나눔고딕코딩"/>
+                <a:latin typeface="D2Coding"/>
+                <a:ea typeface="D2Coding"/>
+                <a:cs typeface="D2Coding"/>
               </a:rPr>
               <a:t>1</a:t>
             </a:r>
@@ -30767,9 +30767,9 @@
                 <a:solidFill>
                   <a:srgbClr val="7A869C"/>
                 </a:solidFill>
-                <a:latin typeface="나눔고딕코딩"/>
-                <a:ea typeface="나눔고딕코딩"/>
-                <a:cs typeface="나눔고딕코딩"/>
+                <a:latin typeface="D2Coding"/>
+                <a:ea typeface="D2Coding"/>
+                <a:cs typeface="D2Coding"/>
               </a:rPr>
               <a:t>2</a:t>
             </a:r>
@@ -30785,9 +30785,9 @@
                 <a:solidFill>
                   <a:srgbClr val="7A869C"/>
                 </a:solidFill>
-                <a:latin typeface="나눔고딕코딩"/>
-                <a:ea typeface="나눔고딕코딩"/>
-                <a:cs typeface="나눔고딕코딩"/>
+                <a:latin typeface="D2Coding"/>
+                <a:ea typeface="D2Coding"/>
+                <a:cs typeface="D2Coding"/>
               </a:rPr>
               <a:t>3</a:t>
             </a:r>
@@ -30803,9 +30803,9 @@
                 <a:solidFill>
                   <a:srgbClr val="7A869C"/>
                 </a:solidFill>
-                <a:latin typeface="나눔고딕코딩"/>
-                <a:ea typeface="나눔고딕코딩"/>
-                <a:cs typeface="나눔고딕코딩"/>
+                <a:latin typeface="D2Coding"/>
+                <a:ea typeface="D2Coding"/>
+                <a:cs typeface="D2Coding"/>
               </a:rPr>
               <a:t>4</a:t>
             </a:r>
@@ -30821,9 +30821,9 @@
                 <a:solidFill>
                   <a:srgbClr val="7A869C"/>
                 </a:solidFill>
-                <a:latin typeface="나눔고딕코딩"/>
-                <a:ea typeface="나눔고딕코딩"/>
-                <a:cs typeface="나눔고딕코딩"/>
+                <a:latin typeface="D2Coding"/>
+                <a:ea typeface="D2Coding"/>
+                <a:cs typeface="D2Coding"/>
               </a:rPr>
               <a:t>5</a:t>
             </a:r>
@@ -30839,9 +30839,9 @@
                 <a:solidFill>
                   <a:srgbClr val="7A869C"/>
                 </a:solidFill>
-                <a:latin typeface="나눔고딕코딩"/>
-                <a:ea typeface="나눔고딕코딩"/>
-                <a:cs typeface="나눔고딕코딩"/>
+                <a:latin typeface="D2Coding"/>
+                <a:ea typeface="D2Coding"/>
+                <a:cs typeface="D2Coding"/>
               </a:rPr>
               <a:t>6</a:t>
             </a:r>
@@ -30857,9 +30857,9 @@
                 <a:solidFill>
                   <a:srgbClr val="7A869C"/>
                 </a:solidFill>
-                <a:latin typeface="나눔고딕코딩"/>
-                <a:ea typeface="나눔고딕코딩"/>
-                <a:cs typeface="나눔고딕코딩"/>
+                <a:latin typeface="D2Coding"/>
+                <a:ea typeface="D2Coding"/>
+                <a:cs typeface="D2Coding"/>
               </a:rPr>
               <a:t>7</a:t>
             </a:r>
@@ -30875,9 +30875,9 @@
                 <a:solidFill>
                   <a:srgbClr val="7A869C"/>
                 </a:solidFill>
-                <a:latin typeface="나눔고딕코딩"/>
-                <a:ea typeface="나눔고딕코딩"/>
-                <a:cs typeface="나눔고딕코딩"/>
+                <a:latin typeface="D2Coding"/>
+                <a:ea typeface="D2Coding"/>
+                <a:cs typeface="D2Coding"/>
               </a:rPr>
               <a:t>8</a:t>
             </a:r>
@@ -30893,9 +30893,9 @@
                 <a:solidFill>
                   <a:srgbClr val="7A869C"/>
                 </a:solidFill>
-                <a:latin typeface="나눔고딕코딩"/>
-                <a:ea typeface="나눔고딕코딩"/>
-                <a:cs typeface="나눔고딕코딩"/>
+                <a:latin typeface="D2Coding"/>
+                <a:ea typeface="D2Coding"/>
+                <a:cs typeface="D2Coding"/>
               </a:rPr>
               <a:t>9</a:t>
             </a:r>
@@ -30911,9 +30911,9 @@
                 <a:solidFill>
                   <a:srgbClr val="7A869C"/>
                 </a:solidFill>
-                <a:latin typeface="나눔고딕코딩"/>
-                <a:ea typeface="나눔고딕코딩"/>
-                <a:cs typeface="나눔고딕코딩"/>
+                <a:latin typeface="D2Coding"/>
+                <a:ea typeface="D2Coding"/>
+                <a:cs typeface="D2Coding"/>
               </a:rPr>
               <a:t>10</a:t>
             </a:r>
@@ -30929,9 +30929,9 @@
                 <a:solidFill>
                   <a:srgbClr val="7A869C"/>
                 </a:solidFill>
-                <a:latin typeface="나눔고딕코딩"/>
-                <a:ea typeface="나눔고딕코딩"/>
-                <a:cs typeface="나눔고딕코딩"/>
+                <a:latin typeface="D2Coding"/>
+                <a:ea typeface="D2Coding"/>
+                <a:cs typeface="D2Coding"/>
               </a:rPr>
               <a:t>11</a:t>
             </a:r>
@@ -30947,9 +30947,9 @@
                 <a:solidFill>
                   <a:srgbClr val="7A869C"/>
                 </a:solidFill>
-                <a:latin typeface="나눔고딕코딩"/>
-                <a:ea typeface="나눔고딕코딩"/>
-                <a:cs typeface="나눔고딕코딩"/>
+                <a:latin typeface="D2Coding"/>
+                <a:ea typeface="D2Coding"/>
+                <a:cs typeface="D2Coding"/>
               </a:rPr>
               <a:t>12</a:t>
             </a:r>
@@ -30988,9 +30988,9 @@
                 <a:solidFill>
                   <a:srgbClr val="E6EAF2"/>
                 </a:solidFill>
-                <a:latin typeface="나눔고딕코딩"/>
-                <a:ea typeface="나눔고딕코딩"/>
-                <a:cs typeface="나눔고딕코딩"/>
+                <a:latin typeface="D2Coding"/>
+                <a:ea typeface="D2Coding"/>
+                <a:cs typeface="D2Coding"/>
               </a:rPr>
               <a:t>-- 우리 고객은 등급별로 몇 명인가?</a:t>
             </a:r>
@@ -31006,9 +31006,9 @@
                 <a:solidFill>
                   <a:srgbClr val="E6EAF2"/>
                 </a:solidFill>
-                <a:latin typeface="나눔고딕코딩"/>
-                <a:ea typeface="나눔고딕코딩"/>
-                <a:cs typeface="나눔고딕코딩"/>
+                <a:latin typeface="D2Coding"/>
+                <a:ea typeface="D2Coding"/>
+                <a:cs typeface="D2Coding"/>
               </a:rPr>
               <a:t>SELECT grade, COUNT(*) AS 고객수, SUM(points) AS 포인트합계</a:t>
             </a:r>
@@ -31024,9 +31024,9 @@
                 <a:solidFill>
                   <a:srgbClr val="E6EAF2"/>
                 </a:solidFill>
-                <a:latin typeface="나눔고딕코딩"/>
-                <a:ea typeface="나눔고딕코딩"/>
-                <a:cs typeface="나눔고딕코딩"/>
+                <a:latin typeface="D2Coding"/>
+                <a:ea typeface="D2Coding"/>
+                <a:cs typeface="D2Coding"/>
               </a:rPr>
               <a:t>FROM   customers</a:t>
             </a:r>
@@ -31042,9 +31042,9 @@
                 <a:solidFill>
                   <a:srgbClr val="E6EAF2"/>
                 </a:solidFill>
-                <a:latin typeface="나눔고딕코딩"/>
-                <a:ea typeface="나눔고딕코딩"/>
-                <a:cs typeface="나눔고딕코딩"/>
+                <a:latin typeface="D2Coding"/>
+                <a:ea typeface="D2Coding"/>
+                <a:cs typeface="D2Coding"/>
               </a:rPr>
               <a:t>GROUP  BY grade;</a:t>
             </a:r>
@@ -31060,9 +31060,9 @@
                 <a:solidFill>
                   <a:srgbClr val="E6EAF2"/>
                 </a:solidFill>
-                <a:latin typeface="나눔고딕코딩"/>
-                <a:ea typeface="나눔고딕코딩"/>
-                <a:cs typeface="나눔고딕코딩"/>
+                <a:latin typeface="D2Coding"/>
+                <a:ea typeface="D2Coding"/>
+                <a:cs typeface="D2Coding"/>
               </a:rPr>
               <a:t/>
             </a:r>
@@ -31078,9 +31078,9 @@
                 <a:solidFill>
                   <a:srgbClr val="E6EAF2"/>
                 </a:solidFill>
-                <a:latin typeface="나눔고딕코딩"/>
-                <a:ea typeface="나눔고딕코딩"/>
-                <a:cs typeface="나눔고딕코딩"/>
+                <a:latin typeface="D2Coding"/>
+                <a:ea typeface="D2Coding"/>
+                <a:cs typeface="D2Coding"/>
               </a:rPr>
               <a:t>-- 가입만 하고 한 번도 주문하지 않은 고객은? (첫 구매 유도 대상)</a:t>
             </a:r>
@@ -31096,9 +31096,9 @@
                 <a:solidFill>
                   <a:srgbClr val="E6EAF2"/>
                 </a:solidFill>
-                <a:latin typeface="나눔고딕코딩"/>
-                <a:ea typeface="나눔고딕코딩"/>
-                <a:cs typeface="나눔고딕코딩"/>
+                <a:latin typeface="D2Coding"/>
+                <a:ea typeface="D2Coding"/>
+                <a:cs typeface="D2Coding"/>
               </a:rPr>
               <a:t>SELECT c.cust_id, c.name, c.joined_date</a:t>
             </a:r>
@@ -31114,9 +31114,9 @@
                 <a:solidFill>
                   <a:srgbClr val="E6EAF2"/>
                 </a:solidFill>
-                <a:latin typeface="나눔고딕코딩"/>
-                <a:ea typeface="나눔고딕코딩"/>
-                <a:cs typeface="나눔고딕코딩"/>
+                <a:latin typeface="D2Coding"/>
+                <a:ea typeface="D2Coding"/>
+                <a:cs typeface="D2Coding"/>
               </a:rPr>
               <a:t>FROM   customers c</a:t>
             </a:r>
@@ -31132,9 +31132,9 @@
                 <a:solidFill>
                   <a:srgbClr val="E6EAF2"/>
                 </a:solidFill>
-                <a:latin typeface="나눔고딕코딩"/>
-                <a:ea typeface="나눔고딕코딩"/>
-                <a:cs typeface="나눔고딕코딩"/>
+                <a:latin typeface="D2Coding"/>
+                <a:ea typeface="D2Coding"/>
+                <a:cs typeface="D2Coding"/>
               </a:rPr>
               <a:t>WHERE  NOT EXISTS (</a:t>
             </a:r>
@@ -31150,9 +31150,9 @@
                 <a:solidFill>
                   <a:srgbClr val="E6EAF2"/>
                 </a:solidFill>
-                <a:latin typeface="나눔고딕코딩"/>
-                <a:ea typeface="나눔고딕코딩"/>
-                <a:cs typeface="나눔고딕코딩"/>
+                <a:latin typeface="D2Coding"/>
+                <a:ea typeface="D2Coding"/>
+                <a:cs typeface="D2Coding"/>
               </a:rPr>
               <a:t>  SELECT 1 FROM orders o WHERE o.cust_id = c.cust_id</a:t>
             </a:r>
@@ -31168,9 +31168,9 @@
                 <a:solidFill>
                   <a:srgbClr val="E6EAF2"/>
                 </a:solidFill>
-                <a:latin typeface="나눔고딕코딩"/>
-                <a:ea typeface="나눔고딕코딩"/>
-                <a:cs typeface="나눔고딕코딩"/>
+                <a:latin typeface="D2Coding"/>
+                <a:ea typeface="D2Coding"/>
+                <a:cs typeface="D2Coding"/>
               </a:rPr>
               <a:t>);</a:t>
             </a:r>
@@ -31186,9 +31186,9 @@
                 <a:solidFill>
                   <a:srgbClr val="E6EAF2"/>
                 </a:solidFill>
-                <a:latin typeface="나눔고딕코딩"/>
-                <a:ea typeface="나눔고딕코딩"/>
-                <a:cs typeface="나눔고딕코딩"/>
+                <a:latin typeface="D2Coding"/>
+                <a:ea typeface="D2Coding"/>
+                <a:cs typeface="D2Coding"/>
               </a:rPr>
               <a:t>-- 다온유통에서는 C010 서지안 고객이 잡힌다</a:t>
             </a:r>
